--- a/LinqOperators.pptx
+++ b/LinqOperators.pptx
@@ -54,7 +54,7 @@
   <p:notesSz cx="6858000" cy="9144000"/>
   <p:embeddedFontLst>
     <p:embeddedFont>
-      <p:font typeface="Roboto" charset="0"/>
+      <p:font typeface="Roboto" panose="020B0604020202020204" charset="0"/>
       <p:regular r:id="rId44"/>
       <p:bold r:id="rId45"/>
       <p:italic r:id="rId46"/>
@@ -292,7 +292,7 @@
   </p:defaultTextStyle>
   <p:extLst>
     <p:ext uri="{EFAFB233-063F-42B5-8137-9DF3F51BA10A}">
-      <p15:sldGuideLst xmlns:p15="http://schemas.microsoft.com/office/powerpoint/2012/main" xmlns="">
+      <p15:sldGuideLst xmlns:p15="http://schemas.microsoft.com/office/powerpoint/2012/main">
         <p15:guide id="1" orient="horz" pos="1620">
           <p15:clr>
             <a:srgbClr val="A4A3A4"/>
@@ -849,7 +849,7 @@
     </p:spTree>
     <p:extLst>
       <p:ext uri="{BB962C8B-B14F-4D97-AF65-F5344CB8AC3E}">
-        <p14:creationId xmlns:p14="http://schemas.microsoft.com/office/powerpoint/2010/main" xmlns="" val="1559280179"/>
+        <p14:creationId xmlns:p14="http://schemas.microsoft.com/office/powerpoint/2010/main" val="1559280179"/>
       </p:ext>
     </p:extLst>
   </p:cSld>
@@ -958,7 +958,7 @@
     </p:spTree>
     <p:extLst>
       <p:ext uri="{BB962C8B-B14F-4D97-AF65-F5344CB8AC3E}">
-        <p14:creationId xmlns:p14="http://schemas.microsoft.com/office/powerpoint/2010/main" xmlns="" val="654581963"/>
+        <p14:creationId xmlns:p14="http://schemas.microsoft.com/office/powerpoint/2010/main" val="654581963"/>
       </p:ext>
     </p:extLst>
   </p:cSld>
@@ -1067,7 +1067,7 @@
     </p:spTree>
     <p:extLst>
       <p:ext uri="{BB962C8B-B14F-4D97-AF65-F5344CB8AC3E}">
-        <p14:creationId xmlns:p14="http://schemas.microsoft.com/office/powerpoint/2010/main" xmlns="" val="1021492477"/>
+        <p14:creationId xmlns:p14="http://schemas.microsoft.com/office/powerpoint/2010/main" val="1021492477"/>
       </p:ext>
     </p:extLst>
   </p:cSld>
@@ -1176,7 +1176,7 @@
     </p:spTree>
     <p:extLst>
       <p:ext uri="{BB962C8B-B14F-4D97-AF65-F5344CB8AC3E}">
-        <p14:creationId xmlns:p14="http://schemas.microsoft.com/office/powerpoint/2010/main" xmlns="" val="81659188"/>
+        <p14:creationId xmlns:p14="http://schemas.microsoft.com/office/powerpoint/2010/main" val="81659188"/>
       </p:ext>
     </p:extLst>
   </p:cSld>
@@ -1285,7 +1285,7 @@
     </p:spTree>
     <p:extLst>
       <p:ext uri="{BB962C8B-B14F-4D97-AF65-F5344CB8AC3E}">
-        <p14:creationId xmlns:p14="http://schemas.microsoft.com/office/powerpoint/2010/main" xmlns="" val="1085354930"/>
+        <p14:creationId xmlns:p14="http://schemas.microsoft.com/office/powerpoint/2010/main" val="1085354930"/>
       </p:ext>
     </p:extLst>
   </p:cSld>
@@ -1394,7 +1394,7 @@
     </p:spTree>
     <p:extLst>
       <p:ext uri="{BB962C8B-B14F-4D97-AF65-F5344CB8AC3E}">
-        <p14:creationId xmlns:p14="http://schemas.microsoft.com/office/powerpoint/2010/main" xmlns="" val="1021492477"/>
+        <p14:creationId xmlns:p14="http://schemas.microsoft.com/office/powerpoint/2010/main" val="1021492477"/>
       </p:ext>
     </p:extLst>
   </p:cSld>
@@ -1503,7 +1503,7 @@
     </p:spTree>
     <p:extLst>
       <p:ext uri="{BB962C8B-B14F-4D97-AF65-F5344CB8AC3E}">
-        <p14:creationId xmlns:p14="http://schemas.microsoft.com/office/powerpoint/2010/main" xmlns="" val="2345650234"/>
+        <p14:creationId xmlns:p14="http://schemas.microsoft.com/office/powerpoint/2010/main" val="2345650234"/>
       </p:ext>
     </p:extLst>
   </p:cSld>
@@ -1612,7 +1612,7 @@
     </p:spTree>
     <p:extLst>
       <p:ext uri="{BB962C8B-B14F-4D97-AF65-F5344CB8AC3E}">
-        <p14:creationId xmlns:p14="http://schemas.microsoft.com/office/powerpoint/2010/main" xmlns="" val="1600546733"/>
+        <p14:creationId xmlns:p14="http://schemas.microsoft.com/office/powerpoint/2010/main" val="1600546733"/>
       </p:ext>
     </p:extLst>
   </p:cSld>
@@ -1721,7 +1721,7 @@
     </p:spTree>
     <p:extLst>
       <p:ext uri="{BB962C8B-B14F-4D97-AF65-F5344CB8AC3E}">
-        <p14:creationId xmlns:p14="http://schemas.microsoft.com/office/powerpoint/2010/main" xmlns="" val="929042244"/>
+        <p14:creationId xmlns:p14="http://schemas.microsoft.com/office/powerpoint/2010/main" val="929042244"/>
       </p:ext>
     </p:extLst>
   </p:cSld>
@@ -1830,7 +1830,7 @@
     </p:spTree>
     <p:extLst>
       <p:ext uri="{BB962C8B-B14F-4D97-AF65-F5344CB8AC3E}">
-        <p14:creationId xmlns:p14="http://schemas.microsoft.com/office/powerpoint/2010/main" xmlns="" val="3690528726"/>
+        <p14:creationId xmlns:p14="http://schemas.microsoft.com/office/powerpoint/2010/main" val="3690528726"/>
       </p:ext>
     </p:extLst>
   </p:cSld>
@@ -1939,7 +1939,7 @@
     </p:spTree>
     <p:extLst>
       <p:ext uri="{BB962C8B-B14F-4D97-AF65-F5344CB8AC3E}">
-        <p14:creationId xmlns:p14="http://schemas.microsoft.com/office/powerpoint/2010/main" xmlns="" val="2966755223"/>
+        <p14:creationId xmlns:p14="http://schemas.microsoft.com/office/powerpoint/2010/main" val="2966755223"/>
       </p:ext>
     </p:extLst>
   </p:cSld>
@@ -2152,7 +2152,7 @@
     </p:spTree>
     <p:extLst>
       <p:ext uri="{BB962C8B-B14F-4D97-AF65-F5344CB8AC3E}">
-        <p14:creationId xmlns:p14="http://schemas.microsoft.com/office/powerpoint/2010/main" xmlns="" val="1489464285"/>
+        <p14:creationId xmlns:p14="http://schemas.microsoft.com/office/powerpoint/2010/main" val="1489464285"/>
       </p:ext>
     </p:extLst>
   </p:cSld>
@@ -2261,7 +2261,7 @@
     </p:spTree>
     <p:extLst>
       <p:ext uri="{BB962C8B-B14F-4D97-AF65-F5344CB8AC3E}">
-        <p14:creationId xmlns:p14="http://schemas.microsoft.com/office/powerpoint/2010/main" xmlns="" val="2354118770"/>
+        <p14:creationId xmlns:p14="http://schemas.microsoft.com/office/powerpoint/2010/main" val="2354118770"/>
       </p:ext>
     </p:extLst>
   </p:cSld>
@@ -2370,7 +2370,7 @@
     </p:spTree>
     <p:extLst>
       <p:ext uri="{BB962C8B-B14F-4D97-AF65-F5344CB8AC3E}">
-        <p14:creationId xmlns:p14="http://schemas.microsoft.com/office/powerpoint/2010/main" xmlns="" val="3868859861"/>
+        <p14:creationId xmlns:p14="http://schemas.microsoft.com/office/powerpoint/2010/main" val="3868859861"/>
       </p:ext>
     </p:extLst>
   </p:cSld>
@@ -2479,7 +2479,7 @@
     </p:spTree>
     <p:extLst>
       <p:ext uri="{BB962C8B-B14F-4D97-AF65-F5344CB8AC3E}">
-        <p14:creationId xmlns:p14="http://schemas.microsoft.com/office/powerpoint/2010/main" xmlns="" val="4139684346"/>
+        <p14:creationId xmlns:p14="http://schemas.microsoft.com/office/powerpoint/2010/main" val="4139684346"/>
       </p:ext>
     </p:extLst>
   </p:cSld>
@@ -2588,7 +2588,7 @@
     </p:spTree>
     <p:extLst>
       <p:ext uri="{BB962C8B-B14F-4D97-AF65-F5344CB8AC3E}">
-        <p14:creationId xmlns:p14="http://schemas.microsoft.com/office/powerpoint/2010/main" xmlns="" val="1221438321"/>
+        <p14:creationId xmlns:p14="http://schemas.microsoft.com/office/powerpoint/2010/main" val="1221438321"/>
       </p:ext>
     </p:extLst>
   </p:cSld>
@@ -2697,7 +2697,7 @@
     </p:spTree>
     <p:extLst>
       <p:ext uri="{BB962C8B-B14F-4D97-AF65-F5344CB8AC3E}">
-        <p14:creationId xmlns:p14="http://schemas.microsoft.com/office/powerpoint/2010/main" xmlns="" val="1021492477"/>
+        <p14:creationId xmlns:p14="http://schemas.microsoft.com/office/powerpoint/2010/main" val="1021492477"/>
       </p:ext>
     </p:extLst>
   </p:cSld>
@@ -2806,7 +2806,7 @@
     </p:spTree>
     <p:extLst>
       <p:ext uri="{BB962C8B-B14F-4D97-AF65-F5344CB8AC3E}">
-        <p14:creationId xmlns:p14="http://schemas.microsoft.com/office/powerpoint/2010/main" xmlns="" val="2742090085"/>
+        <p14:creationId xmlns:p14="http://schemas.microsoft.com/office/powerpoint/2010/main" val="2742090085"/>
       </p:ext>
     </p:extLst>
   </p:cSld>
@@ -2915,7 +2915,7 @@
     </p:spTree>
     <p:extLst>
       <p:ext uri="{BB962C8B-B14F-4D97-AF65-F5344CB8AC3E}">
-        <p14:creationId xmlns:p14="http://schemas.microsoft.com/office/powerpoint/2010/main" xmlns="" val="3112099881"/>
+        <p14:creationId xmlns:p14="http://schemas.microsoft.com/office/powerpoint/2010/main" val="3112099881"/>
       </p:ext>
     </p:extLst>
   </p:cSld>
@@ -3024,7 +3024,7 @@
     </p:spTree>
     <p:extLst>
       <p:ext uri="{BB962C8B-B14F-4D97-AF65-F5344CB8AC3E}">
-        <p14:creationId xmlns:p14="http://schemas.microsoft.com/office/powerpoint/2010/main" xmlns="" val="1623211466"/>
+        <p14:creationId xmlns:p14="http://schemas.microsoft.com/office/powerpoint/2010/main" val="1623211466"/>
       </p:ext>
     </p:extLst>
   </p:cSld>
@@ -3133,7 +3133,7 @@
     </p:spTree>
     <p:extLst>
       <p:ext uri="{BB962C8B-B14F-4D97-AF65-F5344CB8AC3E}">
-        <p14:creationId xmlns:p14="http://schemas.microsoft.com/office/powerpoint/2010/main" xmlns="" val="1065436559"/>
+        <p14:creationId xmlns:p14="http://schemas.microsoft.com/office/powerpoint/2010/main" val="1065436559"/>
       </p:ext>
     </p:extLst>
   </p:cSld>
@@ -3242,7 +3242,7 @@
     </p:spTree>
     <p:extLst>
       <p:ext uri="{BB962C8B-B14F-4D97-AF65-F5344CB8AC3E}">
-        <p14:creationId xmlns:p14="http://schemas.microsoft.com/office/powerpoint/2010/main" xmlns="" val="3548652113"/>
+        <p14:creationId xmlns:p14="http://schemas.microsoft.com/office/powerpoint/2010/main" val="3548652113"/>
       </p:ext>
     </p:extLst>
   </p:cSld>
@@ -3351,7 +3351,7 @@
     </p:spTree>
     <p:extLst>
       <p:ext uri="{BB962C8B-B14F-4D97-AF65-F5344CB8AC3E}">
-        <p14:creationId xmlns:p14="http://schemas.microsoft.com/office/powerpoint/2010/main" xmlns="" val="129939661"/>
+        <p14:creationId xmlns:p14="http://schemas.microsoft.com/office/powerpoint/2010/main" val="129939661"/>
       </p:ext>
     </p:extLst>
   </p:cSld>
@@ -3460,7 +3460,7 @@
     </p:spTree>
     <p:extLst>
       <p:ext uri="{BB962C8B-B14F-4D97-AF65-F5344CB8AC3E}">
-        <p14:creationId xmlns:p14="http://schemas.microsoft.com/office/powerpoint/2010/main" xmlns="" val="575722545"/>
+        <p14:creationId xmlns:p14="http://schemas.microsoft.com/office/powerpoint/2010/main" val="575722545"/>
       </p:ext>
     </p:extLst>
   </p:cSld>
@@ -3569,7 +3569,7 @@
     </p:spTree>
     <p:extLst>
       <p:ext uri="{BB962C8B-B14F-4D97-AF65-F5344CB8AC3E}">
-        <p14:creationId xmlns:p14="http://schemas.microsoft.com/office/powerpoint/2010/main" xmlns="" val="1318932020"/>
+        <p14:creationId xmlns:p14="http://schemas.microsoft.com/office/powerpoint/2010/main" val="1318932020"/>
       </p:ext>
     </p:extLst>
   </p:cSld>
@@ -3678,7 +3678,7 @@
     </p:spTree>
     <p:extLst>
       <p:ext uri="{BB962C8B-B14F-4D97-AF65-F5344CB8AC3E}">
-        <p14:creationId xmlns:p14="http://schemas.microsoft.com/office/powerpoint/2010/main" xmlns="" val="1318932020"/>
+        <p14:creationId xmlns:p14="http://schemas.microsoft.com/office/powerpoint/2010/main" val="1318932020"/>
       </p:ext>
     </p:extLst>
   </p:cSld>
@@ -3787,7 +3787,7 @@
     </p:spTree>
     <p:extLst>
       <p:ext uri="{BB962C8B-B14F-4D97-AF65-F5344CB8AC3E}">
-        <p14:creationId xmlns:p14="http://schemas.microsoft.com/office/powerpoint/2010/main" xmlns="" val="944237588"/>
+        <p14:creationId xmlns:p14="http://schemas.microsoft.com/office/powerpoint/2010/main" val="944237588"/>
       </p:ext>
     </p:extLst>
   </p:cSld>
@@ -5144,7 +5144,7 @@
     </p:spTree>
     <p:extLst>
       <p:ext uri="{BB962C8B-B14F-4D97-AF65-F5344CB8AC3E}">
-        <p14:creationId xmlns:p14="http://schemas.microsoft.com/office/powerpoint/2010/main" xmlns="" val="1094642682"/>
+        <p14:creationId xmlns:p14="http://schemas.microsoft.com/office/powerpoint/2010/main" val="1094642682"/>
       </p:ext>
     </p:extLst>
   </p:cSld>
@@ -9157,7 +9157,7 @@
   </p:clrMapOvr>
   <p:extLst>
     <p:ext uri="{DCECCB84-F9BA-43D5-87BE-67443E8EF086}">
-      <p15:sldGuideLst xmlns:p15="http://schemas.microsoft.com/office/powerpoint/2012/main" xmlns="">
+      <p15:sldGuideLst xmlns:p15="http://schemas.microsoft.com/office/powerpoint/2012/main">
         <p15:guide id="1" pos="397">
           <p15:clr>
             <a:srgbClr val="FA7B17"/>
@@ -12355,7 +12355,7 @@
     </p:spTree>
     <p:extLst>
       <p:ext uri="{BB962C8B-B14F-4D97-AF65-F5344CB8AC3E}">
-        <p14:creationId xmlns:p14="http://schemas.microsoft.com/office/powerpoint/2010/main" xmlns="" val="4136653412"/>
+        <p14:creationId xmlns:p14="http://schemas.microsoft.com/office/powerpoint/2010/main" val="4136653412"/>
       </p:ext>
     </p:extLst>
   </p:cSld>
@@ -12493,7 +12493,7 @@
           <a:blip r:embed="rId3">
             <a:extLst>
               <a:ext uri="{28A0092B-C50C-407E-A947-70E740481C1C}">
-                <a14:useLocalDpi xmlns:a14="http://schemas.microsoft.com/office/drawing/2010/main" xmlns="" val="0"/>
+                <a14:useLocalDpi xmlns:a14="http://schemas.microsoft.com/office/drawing/2010/main" val="0"/>
               </a:ext>
             </a:extLst>
           </a:blip>
@@ -12513,7 +12513,7 @@
           <a:noFill/>
           <a:extLst>
             <a:ext uri="{909E8E84-426E-40DD-AFC4-6F175D3DCCD1}">
-              <a14:hiddenFill xmlns:a14="http://schemas.microsoft.com/office/drawing/2010/main" xmlns="">
+              <a14:hiddenFill xmlns:a14="http://schemas.microsoft.com/office/drawing/2010/main">
                 <a:solidFill>
                   <a:srgbClr val="FFFFFF"/>
                 </a:solidFill>
@@ -12525,18 +12525,18 @@
     </p:spTree>
     <p:extLst>
       <p:ext uri="{BB962C8B-B14F-4D97-AF65-F5344CB8AC3E}">
-        <p14:creationId xmlns:p14="http://schemas.microsoft.com/office/powerpoint/2010/main" xmlns="" val="4046313098"/>
+        <p14:creationId xmlns:p14="http://schemas.microsoft.com/office/powerpoint/2010/main" val="4046313098"/>
       </p:ext>
     </p:extLst>
   </p:cSld>
   <p:clrMapOvr>
     <a:masterClrMapping/>
   </p:clrMapOvr>
-  <mc:AlternateContent xmlns:mc="http://schemas.openxmlformats.org/markup-compatibility/2006">
-    <mc:Choice xmlns:p14="http://schemas.microsoft.com/office/powerpoint/2010/main" xmlns="" Requires="p14">
+  <mc:AlternateContent xmlns:mc="http://schemas.openxmlformats.org/markup-compatibility/2006" xmlns:p14="http://schemas.microsoft.com/office/powerpoint/2010/main">
+    <mc:Choice Requires="p14">
       <p:transition spd="slow" p14:dur="2000"/>
     </mc:Choice>
-    <mc:Fallback>
+    <mc:Fallback xmlns="">
       <p:transition spd="slow"/>
     </mc:Fallback>
   </mc:AlternateContent>
@@ -12732,18 +12732,18 @@
     </p:spTree>
     <p:extLst>
       <p:ext uri="{BB962C8B-B14F-4D97-AF65-F5344CB8AC3E}">
-        <p14:creationId xmlns:p14="http://schemas.microsoft.com/office/powerpoint/2010/main" xmlns="" val="3413217380"/>
+        <p14:creationId xmlns:p14="http://schemas.microsoft.com/office/powerpoint/2010/main" val="3413217380"/>
       </p:ext>
     </p:extLst>
   </p:cSld>
   <p:clrMapOvr>
     <a:masterClrMapping/>
   </p:clrMapOvr>
-  <mc:AlternateContent xmlns:mc="http://schemas.openxmlformats.org/markup-compatibility/2006">
-    <mc:Choice xmlns:p14="http://schemas.microsoft.com/office/powerpoint/2010/main" xmlns="" Requires="p14">
+  <mc:AlternateContent xmlns:mc="http://schemas.openxmlformats.org/markup-compatibility/2006" xmlns:p14="http://schemas.microsoft.com/office/powerpoint/2010/main">
+    <mc:Choice Requires="p14">
       <p:transition spd="slow" p14:dur="2000"/>
     </mc:Choice>
-    <mc:Fallback>
+    <mc:Fallback xmlns="">
       <p:transition spd="slow"/>
     </mc:Fallback>
   </mc:AlternateContent>
@@ -12819,18 +12819,18 @@
     </p:spTree>
     <p:extLst>
       <p:ext uri="{BB962C8B-B14F-4D97-AF65-F5344CB8AC3E}">
-        <p14:creationId xmlns:p14="http://schemas.microsoft.com/office/powerpoint/2010/main" xmlns="" val="1662565824"/>
+        <p14:creationId xmlns:p14="http://schemas.microsoft.com/office/powerpoint/2010/main" val="1662565824"/>
       </p:ext>
     </p:extLst>
   </p:cSld>
   <p:clrMapOvr>
     <a:masterClrMapping/>
   </p:clrMapOvr>
-  <mc:AlternateContent xmlns:mc="http://schemas.openxmlformats.org/markup-compatibility/2006">
-    <mc:Choice xmlns:p14="http://schemas.microsoft.com/office/powerpoint/2010/main" xmlns="" Requires="p14">
+  <mc:AlternateContent xmlns:mc="http://schemas.openxmlformats.org/markup-compatibility/2006" xmlns:p14="http://schemas.microsoft.com/office/powerpoint/2010/main">
+    <mc:Choice Requires="p14">
       <p:transition spd="slow" p14:dur="2000"/>
     </mc:Choice>
-    <mc:Fallback>
+    <mc:Fallback xmlns="">
       <p:transition spd="slow"/>
     </mc:Fallback>
   </mc:AlternateContent>
@@ -12952,25 +12952,7 @@
                 <a:cs typeface="Roboto"/>
                 <a:sym typeface="Roboto"/>
               </a:rPr>
-              <a:t> </a:t>
-            </a:r>
-            <a:r>
-              <a:rPr lang="ru-RU" sz="1300" dirty="0" smtClean="0">
-                <a:latin typeface="Roboto"/>
-                <a:ea typeface="Roboto"/>
-                <a:cs typeface="Roboto"/>
-                <a:sym typeface="Roboto"/>
-              </a:rPr>
-              <a:t>– это </a:t>
-            </a:r>
-            <a:r>
-              <a:rPr lang="ru-RU" sz="1300" dirty="0" smtClean="0">
-                <a:latin typeface="Roboto"/>
-                <a:ea typeface="Roboto"/>
-                <a:cs typeface="Roboto"/>
-                <a:sym typeface="Roboto"/>
-              </a:rPr>
-              <a:t>операция</a:t>
+              <a:t> – это операция</a:t>
             </a:r>
             <a:r>
               <a:rPr lang="en-US" sz="1300" dirty="0" smtClean="0">
@@ -13003,12 +12985,6 @@
               </a:rPr>
               <a:t>.</a:t>
             </a:r>
-            <a:endParaRPr lang="ru-RU" sz="1300" dirty="0" smtClean="0">
-              <a:latin typeface="Roboto"/>
-              <a:ea typeface="Roboto"/>
-              <a:cs typeface="Roboto"/>
-              <a:sym typeface="Roboto"/>
-            </a:endParaRPr>
           </a:p>
         </p:txBody>
       </p:sp>
@@ -13041,18 +13017,18 @@
     </p:spTree>
     <p:extLst>
       <p:ext uri="{BB962C8B-B14F-4D97-AF65-F5344CB8AC3E}">
-        <p14:creationId xmlns:p14="http://schemas.microsoft.com/office/powerpoint/2010/main" xmlns="" val="280835527"/>
+        <p14:creationId xmlns:p14="http://schemas.microsoft.com/office/powerpoint/2010/main" val="280835527"/>
       </p:ext>
     </p:extLst>
   </p:cSld>
   <p:clrMapOvr>
     <a:masterClrMapping/>
   </p:clrMapOvr>
-  <mc:AlternateContent xmlns:mc="http://schemas.openxmlformats.org/markup-compatibility/2006">
-    <mc:Choice xmlns:p14="http://schemas.microsoft.com/office/powerpoint/2010/main" xmlns="" Requires="p14">
+  <mc:AlternateContent xmlns:mc="http://schemas.openxmlformats.org/markup-compatibility/2006" xmlns:p14="http://schemas.microsoft.com/office/powerpoint/2010/main">
+    <mc:Choice Requires="p14">
       <p:transition spd="slow" p14:dur="2000"/>
     </mc:Choice>
-    <mc:Fallback>
+    <mc:Fallback xmlns="">
       <p:transition spd="slow"/>
     </mc:Fallback>
   </mc:AlternateContent>
@@ -13222,7 +13198,15 @@
             </a:r>
             <a:r>
               <a:rPr lang="ru-RU" dirty="0" smtClean="0"/>
-              <a:t>– проецирует последовательности значений, основанных на функции преобразования, а затем выравнивает их в одну последовательность.(в декларативном синтаксисе множественный </a:t>
+              <a:t>– проецирует последовательности значений, основанных на функции преобразования, а затем выравнивает их в одну </a:t>
+            </a:r>
+            <a:r>
+              <a:rPr lang="ru-RU" dirty="0" smtClean="0"/>
+              <a:t>последовательность(в </a:t>
+            </a:r>
+            <a:r>
+              <a:rPr lang="ru-RU" dirty="0" smtClean="0"/>
+              <a:t>декларативном синтаксисе множественный </a:t>
             </a:r>
             <a:r>
               <a:rPr lang="en-US" dirty="0" smtClean="0">
@@ -13264,18 +13248,18 @@
     </p:spTree>
     <p:extLst>
       <p:ext uri="{BB962C8B-B14F-4D97-AF65-F5344CB8AC3E}">
-        <p14:creationId xmlns:p14="http://schemas.microsoft.com/office/powerpoint/2010/main" xmlns="" val="3413217380"/>
+        <p14:creationId xmlns:p14="http://schemas.microsoft.com/office/powerpoint/2010/main" val="3413217380"/>
       </p:ext>
     </p:extLst>
   </p:cSld>
   <p:clrMapOvr>
     <a:masterClrMapping/>
   </p:clrMapOvr>
-  <mc:AlternateContent xmlns:mc="http://schemas.openxmlformats.org/markup-compatibility/2006">
-    <mc:Choice xmlns:p14="http://schemas.microsoft.com/office/powerpoint/2010/main" xmlns="" Requires="p14">
+  <mc:AlternateContent xmlns:mc="http://schemas.openxmlformats.org/markup-compatibility/2006" xmlns:p14="http://schemas.microsoft.com/office/powerpoint/2010/main">
+    <mc:Choice Requires="p14">
       <p:transition spd="slow" p14:dur="2000"/>
     </mc:Choice>
-    <mc:Fallback>
+    <mc:Fallback xmlns="">
       <p:transition spd="slow"/>
     </mc:Fallback>
   </mc:AlternateContent>
@@ -13351,18 +13335,18 @@
     </p:spTree>
     <p:extLst>
       <p:ext uri="{BB962C8B-B14F-4D97-AF65-F5344CB8AC3E}">
-        <p14:creationId xmlns:p14="http://schemas.microsoft.com/office/powerpoint/2010/main" xmlns="" val="4118962620"/>
+        <p14:creationId xmlns:p14="http://schemas.microsoft.com/office/powerpoint/2010/main" val="4118962620"/>
       </p:ext>
     </p:extLst>
   </p:cSld>
   <p:clrMapOvr>
     <a:masterClrMapping/>
   </p:clrMapOvr>
-  <mc:AlternateContent xmlns:mc="http://schemas.openxmlformats.org/markup-compatibility/2006">
-    <mc:Choice xmlns:p14="http://schemas.microsoft.com/office/powerpoint/2010/main" xmlns="" Requires="p14">
+  <mc:AlternateContent xmlns:mc="http://schemas.openxmlformats.org/markup-compatibility/2006" xmlns:p14="http://schemas.microsoft.com/office/powerpoint/2010/main">
+    <mc:Choice Requires="p14">
       <p:transition spd="slow" p14:dur="2000"/>
     </mc:Choice>
-    <mc:Fallback>
+    <mc:Fallback xmlns="">
       <p:transition spd="slow"/>
     </mc:Fallback>
   </mc:AlternateContent>
@@ -13556,7 +13540,7 @@
           <a:blip r:embed="rId5">
             <a:extLst>
               <a:ext uri="{28A0092B-C50C-407E-A947-70E740481C1C}">
-                <a14:useLocalDpi xmlns:a14="http://schemas.microsoft.com/office/drawing/2010/main" xmlns="" val="0"/>
+                <a14:useLocalDpi xmlns:a14="http://schemas.microsoft.com/office/drawing/2010/main" val="0"/>
               </a:ext>
             </a:extLst>
           </a:blip>
@@ -13576,7 +13560,7 @@
           <a:noFill/>
           <a:extLst>
             <a:ext uri="{909E8E84-426E-40DD-AFC4-6F175D3DCCD1}">
-              <a14:hiddenFill xmlns:a14="http://schemas.microsoft.com/office/drawing/2010/main" xmlns="">
+              <a14:hiddenFill xmlns:a14="http://schemas.microsoft.com/office/drawing/2010/main">
                 <a:solidFill>
                   <a:srgbClr val="FFFFFF"/>
                 </a:solidFill>
@@ -13663,7 +13647,7 @@
           <a:blip r:embed="rId8">
             <a:extLst>
               <a:ext uri="{28A0092B-C50C-407E-A947-70E740481C1C}">
-                <a14:useLocalDpi xmlns:a14="http://schemas.microsoft.com/office/drawing/2010/main" xmlns="" val="0"/>
+                <a14:useLocalDpi xmlns:a14="http://schemas.microsoft.com/office/drawing/2010/main" val="0"/>
               </a:ext>
             </a:extLst>
           </a:blip>
@@ -13683,7 +13667,7 @@
           <a:noFill/>
           <a:extLst>
             <a:ext uri="{909E8E84-426E-40DD-AFC4-6F175D3DCCD1}">
-              <a14:hiddenFill xmlns:a14="http://schemas.microsoft.com/office/drawing/2010/main" xmlns="">
+              <a14:hiddenFill xmlns:a14="http://schemas.microsoft.com/office/drawing/2010/main">
                 <a:solidFill>
                   <a:srgbClr val="FFFFFF"/>
                 </a:solidFill>
@@ -13695,18 +13679,18 @@
     </p:spTree>
     <p:extLst>
       <p:ext uri="{BB962C8B-B14F-4D97-AF65-F5344CB8AC3E}">
-        <p14:creationId xmlns:p14="http://schemas.microsoft.com/office/powerpoint/2010/main" xmlns="" val="2305462432"/>
+        <p14:creationId xmlns:p14="http://schemas.microsoft.com/office/powerpoint/2010/main" val="2305462432"/>
       </p:ext>
     </p:extLst>
   </p:cSld>
   <p:clrMapOvr>
     <a:masterClrMapping/>
   </p:clrMapOvr>
-  <mc:AlternateContent xmlns:mc="http://schemas.openxmlformats.org/markup-compatibility/2006">
-    <mc:Choice xmlns:p14="http://schemas.microsoft.com/office/powerpoint/2010/main" xmlns="" Requires="p14">
+  <mc:AlternateContent xmlns:mc="http://schemas.openxmlformats.org/markup-compatibility/2006" xmlns:p14="http://schemas.microsoft.com/office/powerpoint/2010/main">
+    <mc:Choice Requires="p14">
       <p:transition spd="slow" p14:dur="2000"/>
     </mc:Choice>
-    <mc:Fallback>
+    <mc:Fallback xmlns="">
       <p:transition spd="slow"/>
     </mc:Fallback>
   </mc:AlternateContent>
@@ -13928,7 +13912,7 @@
           <a:blip r:embed="rId7">
             <a:extLst>
               <a:ext uri="{28A0092B-C50C-407E-A947-70E740481C1C}">
-                <a14:useLocalDpi xmlns:a14="http://schemas.microsoft.com/office/drawing/2010/main" xmlns="" val="0"/>
+                <a14:useLocalDpi xmlns:a14="http://schemas.microsoft.com/office/drawing/2010/main" val="0"/>
               </a:ext>
             </a:extLst>
           </a:blip>
@@ -13948,7 +13932,7 @@
           <a:noFill/>
           <a:extLst>
             <a:ext uri="{909E8E84-426E-40DD-AFC4-6F175D3DCCD1}">
-              <a14:hiddenFill xmlns:a14="http://schemas.microsoft.com/office/drawing/2010/main" xmlns="">
+              <a14:hiddenFill xmlns:a14="http://schemas.microsoft.com/office/drawing/2010/main">
                 <a:solidFill>
                   <a:srgbClr val="FFFFFF"/>
                 </a:solidFill>
@@ -13969,7 +13953,7 @@
           <a:blip r:embed="rId8">
             <a:extLst>
               <a:ext uri="{28A0092B-C50C-407E-A947-70E740481C1C}">
-                <a14:useLocalDpi xmlns:a14="http://schemas.microsoft.com/office/drawing/2010/main" xmlns="" val="0"/>
+                <a14:useLocalDpi xmlns:a14="http://schemas.microsoft.com/office/drawing/2010/main" val="0"/>
               </a:ext>
             </a:extLst>
           </a:blip>
@@ -13989,7 +13973,7 @@
           <a:noFill/>
           <a:extLst>
             <a:ext uri="{909E8E84-426E-40DD-AFC4-6F175D3DCCD1}">
-              <a14:hiddenFill xmlns:a14="http://schemas.microsoft.com/office/drawing/2010/main" xmlns="">
+              <a14:hiddenFill xmlns:a14="http://schemas.microsoft.com/office/drawing/2010/main">
                 <a:solidFill>
                   <a:srgbClr val="FFFFFF"/>
                 </a:solidFill>
@@ -14001,18 +13985,18 @@
     </p:spTree>
     <p:extLst>
       <p:ext uri="{BB962C8B-B14F-4D97-AF65-F5344CB8AC3E}">
-        <p14:creationId xmlns:p14="http://schemas.microsoft.com/office/powerpoint/2010/main" xmlns="" val="3055765978"/>
+        <p14:creationId xmlns:p14="http://schemas.microsoft.com/office/powerpoint/2010/main" val="3055765978"/>
       </p:ext>
     </p:extLst>
   </p:cSld>
   <p:clrMapOvr>
     <a:masterClrMapping/>
   </p:clrMapOvr>
-  <mc:AlternateContent xmlns:mc="http://schemas.openxmlformats.org/markup-compatibility/2006">
-    <mc:Choice xmlns:p14="http://schemas.microsoft.com/office/powerpoint/2010/main" xmlns="" Requires="p14">
+  <mc:AlternateContent xmlns:mc="http://schemas.openxmlformats.org/markup-compatibility/2006" xmlns:p14="http://schemas.microsoft.com/office/powerpoint/2010/main">
+    <mc:Choice Requires="p14">
       <p:transition spd="slow" p14:dur="2000"/>
     </mc:Choice>
-    <mc:Fallback>
+    <mc:Fallback xmlns="">
       <p:transition spd="slow"/>
     </mc:Fallback>
   </mc:AlternateContent>
@@ -14080,18 +14064,18 @@
     </p:spTree>
     <p:extLst>
       <p:ext uri="{BB962C8B-B14F-4D97-AF65-F5344CB8AC3E}">
-        <p14:creationId xmlns:p14="http://schemas.microsoft.com/office/powerpoint/2010/main" xmlns="" val="2409115406"/>
+        <p14:creationId xmlns:p14="http://schemas.microsoft.com/office/powerpoint/2010/main" val="2409115406"/>
       </p:ext>
     </p:extLst>
   </p:cSld>
   <p:clrMapOvr>
     <a:masterClrMapping/>
   </p:clrMapOvr>
-  <mc:AlternateContent xmlns:mc="http://schemas.openxmlformats.org/markup-compatibility/2006">
-    <mc:Choice xmlns:p14="http://schemas.microsoft.com/office/powerpoint/2010/main" xmlns="" Requires="p14">
+  <mc:AlternateContent xmlns:mc="http://schemas.openxmlformats.org/markup-compatibility/2006" xmlns:p14="http://schemas.microsoft.com/office/powerpoint/2010/main">
+    <mc:Choice Requires="p14">
       <p:transition spd="slow" p14:dur="2000"/>
     </mc:Choice>
-    <mc:Fallback>
+    <mc:Fallback xmlns="">
       <p:transition spd="slow"/>
     </mc:Fallback>
   </mc:AlternateContent>
@@ -14397,7 +14381,7 @@
           <a:blip r:embed="rId5">
             <a:extLst>
               <a:ext uri="{28A0092B-C50C-407E-A947-70E740481C1C}">
-                <a14:useLocalDpi xmlns:a14="http://schemas.microsoft.com/office/drawing/2010/main" xmlns="" val="0"/>
+                <a14:useLocalDpi xmlns:a14="http://schemas.microsoft.com/office/drawing/2010/main" val="0"/>
               </a:ext>
             </a:extLst>
           </a:blip>
@@ -14417,7 +14401,7 @@
           <a:noFill/>
           <a:extLst>
             <a:ext uri="{909E8E84-426E-40DD-AFC4-6F175D3DCCD1}">
-              <a14:hiddenFill xmlns:a14="http://schemas.microsoft.com/office/drawing/2010/main" xmlns="">
+              <a14:hiddenFill xmlns:a14="http://schemas.microsoft.com/office/drawing/2010/main">
                 <a:solidFill>
                   <a:srgbClr val="FFFFFF"/>
                 </a:solidFill>
@@ -14429,18 +14413,18 @@
     </p:spTree>
     <p:extLst>
       <p:ext uri="{BB962C8B-B14F-4D97-AF65-F5344CB8AC3E}">
-        <p14:creationId xmlns:p14="http://schemas.microsoft.com/office/powerpoint/2010/main" xmlns="" val="212902253"/>
+        <p14:creationId xmlns:p14="http://schemas.microsoft.com/office/powerpoint/2010/main" val="212902253"/>
       </p:ext>
     </p:extLst>
   </p:cSld>
   <p:clrMapOvr>
     <a:masterClrMapping/>
   </p:clrMapOvr>
-  <mc:AlternateContent xmlns:mc="http://schemas.openxmlformats.org/markup-compatibility/2006">
-    <mc:Choice xmlns:p14="http://schemas.microsoft.com/office/powerpoint/2010/main" xmlns="" Requires="p14">
+  <mc:AlternateContent xmlns:mc="http://schemas.openxmlformats.org/markup-compatibility/2006" xmlns:p14="http://schemas.microsoft.com/office/powerpoint/2010/main">
+    <mc:Choice Requires="p14">
       <p:transition spd="slow" p14:dur="2000"/>
     </mc:Choice>
-    <mc:Fallback>
+    <mc:Fallback xmlns="">
       <p:transition spd="slow"/>
     </mc:Fallback>
   </mc:AlternateContent>
@@ -15028,18 +15012,18 @@
     </p:spTree>
     <p:extLst>
       <p:ext uri="{BB962C8B-B14F-4D97-AF65-F5344CB8AC3E}">
-        <p14:creationId xmlns:p14="http://schemas.microsoft.com/office/powerpoint/2010/main" xmlns="" val="1643307161"/>
+        <p14:creationId xmlns:p14="http://schemas.microsoft.com/office/powerpoint/2010/main" val="1643307161"/>
       </p:ext>
     </p:extLst>
   </p:cSld>
   <p:clrMapOvr>
     <a:masterClrMapping/>
   </p:clrMapOvr>
-  <mc:AlternateContent xmlns:mc="http://schemas.openxmlformats.org/markup-compatibility/2006">
-    <mc:Choice xmlns:p14="http://schemas.microsoft.com/office/powerpoint/2010/main" xmlns="" Requires="p14">
+  <mc:AlternateContent xmlns:mc="http://schemas.openxmlformats.org/markup-compatibility/2006" xmlns:p14="http://schemas.microsoft.com/office/powerpoint/2010/main">
+    <mc:Choice Requires="p14">
       <p:transition spd="slow" p14:dur="2000"/>
     </mc:Choice>
-    <mc:Fallback>
+    <mc:Fallback xmlns="">
       <p:transition spd="slow"/>
     </mc:Fallback>
   </mc:AlternateContent>
@@ -15107,18 +15091,18 @@
     </p:spTree>
     <p:extLst>
       <p:ext uri="{BB962C8B-B14F-4D97-AF65-F5344CB8AC3E}">
-        <p14:creationId xmlns:p14="http://schemas.microsoft.com/office/powerpoint/2010/main" xmlns="" val="3680781265"/>
+        <p14:creationId xmlns:p14="http://schemas.microsoft.com/office/powerpoint/2010/main" val="3680781265"/>
       </p:ext>
     </p:extLst>
   </p:cSld>
   <p:clrMapOvr>
     <a:masterClrMapping/>
   </p:clrMapOvr>
-  <mc:AlternateContent xmlns:mc="http://schemas.openxmlformats.org/markup-compatibility/2006">
-    <mc:Choice xmlns:p14="http://schemas.microsoft.com/office/powerpoint/2010/main" xmlns="" Requires="p14">
+  <mc:AlternateContent xmlns:mc="http://schemas.openxmlformats.org/markup-compatibility/2006" xmlns:p14="http://schemas.microsoft.com/office/powerpoint/2010/main">
+    <mc:Choice Requires="p14">
       <p:transition spd="slow" p14:dur="2000"/>
     </mc:Choice>
-    <mc:Fallback>
+    <mc:Fallback xmlns="">
       <p:transition spd="slow"/>
     </mc:Fallback>
   </mc:AlternateContent>
@@ -15374,7 +15358,7 @@
           <a:blip r:embed="rId6">
             <a:extLst>
               <a:ext uri="{28A0092B-C50C-407E-A947-70E740481C1C}">
-                <a14:useLocalDpi xmlns:a14="http://schemas.microsoft.com/office/drawing/2010/main" xmlns="" val="0"/>
+                <a14:useLocalDpi xmlns:a14="http://schemas.microsoft.com/office/drawing/2010/main" val="0"/>
               </a:ext>
             </a:extLst>
           </a:blip>
@@ -15394,7 +15378,7 @@
           <a:noFill/>
           <a:extLst>
             <a:ext uri="{909E8E84-426E-40DD-AFC4-6F175D3DCCD1}">
-              <a14:hiddenFill xmlns:a14="http://schemas.microsoft.com/office/drawing/2010/main" xmlns="">
+              <a14:hiddenFill xmlns:a14="http://schemas.microsoft.com/office/drawing/2010/main">
                 <a:solidFill>
                   <a:srgbClr val="FFFFFF"/>
                 </a:solidFill>
@@ -15406,18 +15390,18 @@
     </p:spTree>
     <p:extLst>
       <p:ext uri="{BB962C8B-B14F-4D97-AF65-F5344CB8AC3E}">
-        <p14:creationId xmlns:p14="http://schemas.microsoft.com/office/powerpoint/2010/main" xmlns="" val="2592654393"/>
+        <p14:creationId xmlns:p14="http://schemas.microsoft.com/office/powerpoint/2010/main" val="2592654393"/>
       </p:ext>
     </p:extLst>
   </p:cSld>
   <p:clrMapOvr>
     <a:masterClrMapping/>
   </p:clrMapOvr>
-  <mc:AlternateContent xmlns:mc="http://schemas.openxmlformats.org/markup-compatibility/2006">
-    <mc:Choice xmlns:p14="http://schemas.microsoft.com/office/powerpoint/2010/main" xmlns="" Requires="p14">
+  <mc:AlternateContent xmlns:mc="http://schemas.openxmlformats.org/markup-compatibility/2006" xmlns:p14="http://schemas.microsoft.com/office/powerpoint/2010/main">
+    <mc:Choice Requires="p14">
       <p:transition spd="slow" p14:dur="2000"/>
     </mc:Choice>
-    <mc:Fallback>
+    <mc:Fallback xmlns="">
       <p:transition spd="slow"/>
     </mc:Fallback>
   </mc:AlternateContent>
@@ -15485,18 +15469,18 @@
     </p:spTree>
     <p:extLst>
       <p:ext uri="{BB962C8B-B14F-4D97-AF65-F5344CB8AC3E}">
-        <p14:creationId xmlns:p14="http://schemas.microsoft.com/office/powerpoint/2010/main" xmlns="" val="3068637521"/>
+        <p14:creationId xmlns:p14="http://schemas.microsoft.com/office/powerpoint/2010/main" val="3068637521"/>
       </p:ext>
     </p:extLst>
   </p:cSld>
   <p:clrMapOvr>
     <a:masterClrMapping/>
   </p:clrMapOvr>
-  <mc:AlternateContent xmlns:mc="http://schemas.openxmlformats.org/markup-compatibility/2006">
-    <mc:Choice xmlns:p14="http://schemas.microsoft.com/office/powerpoint/2010/main" xmlns="" Requires="p14">
+  <mc:AlternateContent xmlns:mc="http://schemas.openxmlformats.org/markup-compatibility/2006" xmlns:p14="http://schemas.microsoft.com/office/powerpoint/2010/main">
+    <mc:Choice Requires="p14">
       <p:transition spd="slow" p14:dur="2000"/>
     </mc:Choice>
-    <mc:Fallback>
+    <mc:Fallback xmlns="">
       <p:transition spd="slow"/>
     </mc:Fallback>
   </mc:AlternateContent>
@@ -15648,18 +15632,18 @@
     </p:spTree>
     <p:extLst>
       <p:ext uri="{BB962C8B-B14F-4D97-AF65-F5344CB8AC3E}">
-        <p14:creationId xmlns:p14="http://schemas.microsoft.com/office/powerpoint/2010/main" xmlns="" val="2286364354"/>
+        <p14:creationId xmlns:p14="http://schemas.microsoft.com/office/powerpoint/2010/main" val="2286364354"/>
       </p:ext>
     </p:extLst>
   </p:cSld>
   <p:clrMapOvr>
     <a:masterClrMapping/>
   </p:clrMapOvr>
-  <mc:AlternateContent xmlns:mc="http://schemas.openxmlformats.org/markup-compatibility/2006">
-    <mc:Choice xmlns:p14="http://schemas.microsoft.com/office/powerpoint/2010/main" xmlns="" Requires="p14">
+  <mc:AlternateContent xmlns:mc="http://schemas.openxmlformats.org/markup-compatibility/2006" xmlns:p14="http://schemas.microsoft.com/office/powerpoint/2010/main">
+    <mc:Choice Requires="p14">
       <p:transition spd="slow" p14:dur="2000"/>
     </mc:Choice>
-    <mc:Fallback>
+    <mc:Fallback xmlns="">
       <p:transition spd="slow"/>
     </mc:Fallback>
   </mc:AlternateContent>
@@ -15889,18 +15873,18 @@
     </p:spTree>
     <p:extLst>
       <p:ext uri="{BB962C8B-B14F-4D97-AF65-F5344CB8AC3E}">
-        <p14:creationId xmlns:p14="http://schemas.microsoft.com/office/powerpoint/2010/main" xmlns="" val="3413217380"/>
+        <p14:creationId xmlns:p14="http://schemas.microsoft.com/office/powerpoint/2010/main" val="3413217380"/>
       </p:ext>
     </p:extLst>
   </p:cSld>
   <p:clrMapOvr>
     <a:masterClrMapping/>
   </p:clrMapOvr>
-  <mc:AlternateContent xmlns:mc="http://schemas.openxmlformats.org/markup-compatibility/2006">
-    <mc:Choice xmlns:p14="http://schemas.microsoft.com/office/powerpoint/2010/main" xmlns="" Requires="p14">
+  <mc:AlternateContent xmlns:mc="http://schemas.openxmlformats.org/markup-compatibility/2006" xmlns:p14="http://schemas.microsoft.com/office/powerpoint/2010/main">
+    <mc:Choice Requires="p14">
       <p:transition spd="slow" p14:dur="2000"/>
     </mc:Choice>
-    <mc:Fallback>
+    <mc:Fallback xmlns="">
       <p:transition spd="slow"/>
     </mc:Fallback>
   </mc:AlternateContent>
@@ -15968,18 +15952,18 @@
     </p:spTree>
     <p:extLst>
       <p:ext uri="{BB962C8B-B14F-4D97-AF65-F5344CB8AC3E}">
-        <p14:creationId xmlns:p14="http://schemas.microsoft.com/office/powerpoint/2010/main" xmlns="" val="2759801090"/>
+        <p14:creationId xmlns:p14="http://schemas.microsoft.com/office/powerpoint/2010/main" val="2759801090"/>
       </p:ext>
     </p:extLst>
   </p:cSld>
   <p:clrMapOvr>
     <a:masterClrMapping/>
   </p:clrMapOvr>
-  <mc:AlternateContent xmlns:mc="http://schemas.openxmlformats.org/markup-compatibility/2006">
-    <mc:Choice xmlns:p14="http://schemas.microsoft.com/office/powerpoint/2010/main" xmlns="" Requires="p14">
+  <mc:AlternateContent xmlns:mc="http://schemas.openxmlformats.org/markup-compatibility/2006" xmlns:p14="http://schemas.microsoft.com/office/powerpoint/2010/main">
+    <mc:Choice Requires="p14">
       <p:transition spd="slow" p14:dur="2000"/>
     </mc:Choice>
-    <mc:Fallback>
+    <mc:Fallback xmlns="">
       <p:transition spd="slow"/>
     </mc:Fallback>
   </mc:AlternateContent>
@@ -16156,18 +16140,18 @@
     </p:spTree>
     <p:extLst>
       <p:ext uri="{BB962C8B-B14F-4D97-AF65-F5344CB8AC3E}">
-        <p14:creationId xmlns:p14="http://schemas.microsoft.com/office/powerpoint/2010/main" xmlns="" val="2868777987"/>
+        <p14:creationId xmlns:p14="http://schemas.microsoft.com/office/powerpoint/2010/main" val="2868777987"/>
       </p:ext>
     </p:extLst>
   </p:cSld>
   <p:clrMapOvr>
     <a:masterClrMapping/>
   </p:clrMapOvr>
-  <mc:AlternateContent xmlns:mc="http://schemas.openxmlformats.org/markup-compatibility/2006">
-    <mc:Choice xmlns:p14="http://schemas.microsoft.com/office/powerpoint/2010/main" xmlns="" Requires="p14">
+  <mc:AlternateContent xmlns:mc="http://schemas.openxmlformats.org/markup-compatibility/2006" xmlns:p14="http://schemas.microsoft.com/office/powerpoint/2010/main">
+    <mc:Choice Requires="p14">
       <p:transition spd="slow" p14:dur="2000"/>
     </mc:Choice>
-    <mc:Fallback>
+    <mc:Fallback xmlns="">
       <p:transition spd="slow"/>
     </mc:Fallback>
   </mc:AlternateContent>
@@ -16235,18 +16219,18 @@
     </p:spTree>
     <p:extLst>
       <p:ext uri="{BB962C8B-B14F-4D97-AF65-F5344CB8AC3E}">
-        <p14:creationId xmlns:p14="http://schemas.microsoft.com/office/powerpoint/2010/main" xmlns="" val="1261440625"/>
+        <p14:creationId xmlns:p14="http://schemas.microsoft.com/office/powerpoint/2010/main" val="1261440625"/>
       </p:ext>
     </p:extLst>
   </p:cSld>
   <p:clrMapOvr>
     <a:masterClrMapping/>
   </p:clrMapOvr>
-  <mc:AlternateContent xmlns:mc="http://schemas.openxmlformats.org/markup-compatibility/2006">
-    <mc:Choice xmlns:p14="http://schemas.microsoft.com/office/powerpoint/2010/main" xmlns="" Requires="p14">
+  <mc:AlternateContent xmlns:mc="http://schemas.openxmlformats.org/markup-compatibility/2006" xmlns:p14="http://schemas.microsoft.com/office/powerpoint/2010/main">
+    <mc:Choice Requires="p14">
       <p:transition spd="slow" p14:dur="2000"/>
     </mc:Choice>
-    <mc:Fallback>
+    <mc:Fallback xmlns="">
       <p:transition spd="slow"/>
     </mc:Fallback>
   </mc:AlternateContent>
@@ -16904,18 +16888,18 @@
     </p:spTree>
     <p:extLst>
       <p:ext uri="{BB962C8B-B14F-4D97-AF65-F5344CB8AC3E}">
-        <p14:creationId xmlns:p14="http://schemas.microsoft.com/office/powerpoint/2010/main" xmlns="" val="3965022812"/>
+        <p14:creationId xmlns:p14="http://schemas.microsoft.com/office/powerpoint/2010/main" val="3965022812"/>
       </p:ext>
     </p:extLst>
   </p:cSld>
   <p:clrMapOvr>
     <a:masterClrMapping/>
   </p:clrMapOvr>
-  <mc:AlternateContent xmlns:mc="http://schemas.openxmlformats.org/markup-compatibility/2006">
-    <mc:Choice xmlns:p14="http://schemas.microsoft.com/office/powerpoint/2010/main" xmlns="" Requires="p14">
+  <mc:AlternateContent xmlns:mc="http://schemas.openxmlformats.org/markup-compatibility/2006" xmlns:p14="http://schemas.microsoft.com/office/powerpoint/2010/main">
+    <mc:Choice Requires="p14">
       <p:transition spd="slow" p14:dur="2000"/>
     </mc:Choice>
-    <mc:Fallback>
+    <mc:Fallback xmlns="">
       <p:transition spd="slow"/>
     </mc:Fallback>
   </mc:AlternateContent>
@@ -17345,19 +17329,7 @@
                 <a:cs typeface="Roboto"/>
                 <a:sym typeface="Roboto"/>
               </a:rPr>
-              <a:t>C# </a:t>
-            </a:r>
-            <a:r>
-              <a:rPr lang="en-US" sz="1300" i="1" dirty="0" smtClean="0">
-                <a:solidFill>
-                  <a:schemeClr val="dk1"/>
-                </a:solidFill>
-                <a:latin typeface="Roboto"/>
-                <a:ea typeface="Roboto"/>
-                <a:cs typeface="Roboto"/>
-                <a:sym typeface="Roboto"/>
-              </a:rPr>
-              <a:t>Basic</a:t>
+              <a:t>C# Basic</a:t>
             </a:r>
             <a:endParaRPr sz="1300" i="1">
               <a:solidFill>
@@ -17473,7 +17445,7 @@
     </p:spTree>
     <p:extLst>
       <p:ext uri="{BB962C8B-B14F-4D97-AF65-F5344CB8AC3E}">
-        <p14:creationId xmlns:p14="http://schemas.microsoft.com/office/powerpoint/2010/main" xmlns="" val="1849832399"/>
+        <p14:creationId xmlns:p14="http://schemas.microsoft.com/office/powerpoint/2010/main" val="1849832399"/>
       </p:ext>
     </p:extLst>
   </p:cSld>
@@ -17606,7 +17578,7 @@
           <a:blip r:embed="rId3">
             <a:extLst>
               <a:ext uri="{28A0092B-C50C-407E-A947-70E740481C1C}">
-                <a14:useLocalDpi xmlns:a14="http://schemas.microsoft.com/office/drawing/2010/main" xmlns="" val="0"/>
+                <a14:useLocalDpi xmlns:a14="http://schemas.microsoft.com/office/drawing/2010/main" val="0"/>
               </a:ext>
             </a:extLst>
           </a:blip>
@@ -17626,7 +17598,7 @@
           <a:noFill/>
           <a:extLst>
             <a:ext uri="{909E8E84-426E-40DD-AFC4-6F175D3DCCD1}">
-              <a14:hiddenFill xmlns:a14="http://schemas.microsoft.com/office/drawing/2010/main" xmlns="">
+              <a14:hiddenFill xmlns:a14="http://schemas.microsoft.com/office/drawing/2010/main">
                 <a:solidFill>
                   <a:srgbClr val="FFFFFF"/>
                 </a:solidFill>
@@ -17638,18 +17610,18 @@
     </p:spTree>
     <p:extLst>
       <p:ext uri="{BB962C8B-B14F-4D97-AF65-F5344CB8AC3E}">
-        <p14:creationId xmlns:p14="http://schemas.microsoft.com/office/powerpoint/2010/main" xmlns="" val="4207692567"/>
+        <p14:creationId xmlns:p14="http://schemas.microsoft.com/office/powerpoint/2010/main" val="4207692567"/>
       </p:ext>
     </p:extLst>
   </p:cSld>
   <p:clrMapOvr>
     <a:masterClrMapping/>
   </p:clrMapOvr>
-  <mc:AlternateContent xmlns:mc="http://schemas.openxmlformats.org/markup-compatibility/2006">
-    <mc:Choice xmlns:p14="http://schemas.microsoft.com/office/powerpoint/2010/main" xmlns="" Requires="p14">
+  <mc:AlternateContent xmlns:mc="http://schemas.openxmlformats.org/markup-compatibility/2006" xmlns:p14="http://schemas.microsoft.com/office/powerpoint/2010/main">
+    <mc:Choice Requires="p14">
       <p:transition spd="slow" p14:dur="2000"/>
     </mc:Choice>
-    <mc:Fallback>
+    <mc:Fallback xmlns="">
       <p:transition spd="slow"/>
     </mc:Fallback>
   </mc:AlternateContent>
@@ -17717,18 +17689,18 @@
     </p:spTree>
     <p:extLst>
       <p:ext uri="{BB962C8B-B14F-4D97-AF65-F5344CB8AC3E}">
-        <p14:creationId xmlns:p14="http://schemas.microsoft.com/office/powerpoint/2010/main" xmlns="" val="2230076095"/>
+        <p14:creationId xmlns:p14="http://schemas.microsoft.com/office/powerpoint/2010/main" val="2230076095"/>
       </p:ext>
     </p:extLst>
   </p:cSld>
   <p:clrMapOvr>
     <a:masterClrMapping/>
   </p:clrMapOvr>
-  <mc:AlternateContent xmlns:mc="http://schemas.openxmlformats.org/markup-compatibility/2006">
-    <mc:Choice xmlns:p14="http://schemas.microsoft.com/office/powerpoint/2010/main" xmlns="" Requires="p14">
+  <mc:AlternateContent xmlns:mc="http://schemas.openxmlformats.org/markup-compatibility/2006" xmlns:p14="http://schemas.microsoft.com/office/powerpoint/2010/main">
+    <mc:Choice Requires="p14">
       <p:transition spd="slow" p14:dur="2000"/>
     </mc:Choice>
-    <mc:Fallback>
+    <mc:Fallback xmlns="">
       <p:transition spd="slow"/>
     </mc:Fallback>
   </mc:AlternateContent>
@@ -17848,7 +17820,7 @@
           <a:blip r:embed="rId3">
             <a:extLst>
               <a:ext uri="{28A0092B-C50C-407E-A947-70E740481C1C}">
-                <a14:useLocalDpi xmlns:a14="http://schemas.microsoft.com/office/drawing/2010/main" xmlns="" val="0"/>
+                <a14:useLocalDpi xmlns:a14="http://schemas.microsoft.com/office/drawing/2010/main" val="0"/>
               </a:ext>
             </a:extLst>
           </a:blip>
@@ -17868,7 +17840,7 @@
           <a:noFill/>
           <a:extLst>
             <a:ext uri="{909E8E84-426E-40DD-AFC4-6F175D3DCCD1}">
-              <a14:hiddenFill xmlns:a14="http://schemas.microsoft.com/office/drawing/2010/main" xmlns="">
+              <a14:hiddenFill xmlns:a14="http://schemas.microsoft.com/office/drawing/2010/main">
                 <a:solidFill>
                   <a:srgbClr val="FFFFFF"/>
                 </a:solidFill>
@@ -17880,18 +17852,18 @@
     </p:spTree>
     <p:extLst>
       <p:ext uri="{BB962C8B-B14F-4D97-AF65-F5344CB8AC3E}">
-        <p14:creationId xmlns:p14="http://schemas.microsoft.com/office/powerpoint/2010/main" xmlns="" val="3775352260"/>
+        <p14:creationId xmlns:p14="http://schemas.microsoft.com/office/powerpoint/2010/main" val="3775352260"/>
       </p:ext>
     </p:extLst>
   </p:cSld>
   <p:clrMapOvr>
     <a:masterClrMapping/>
   </p:clrMapOvr>
-  <mc:AlternateContent xmlns:mc="http://schemas.openxmlformats.org/markup-compatibility/2006">
-    <mc:Choice xmlns:p14="http://schemas.microsoft.com/office/powerpoint/2010/main" xmlns="" Requires="p14">
+  <mc:AlternateContent xmlns:mc="http://schemas.openxmlformats.org/markup-compatibility/2006" xmlns:p14="http://schemas.microsoft.com/office/powerpoint/2010/main">
+    <mc:Choice Requires="p14">
       <p:transition spd="slow" p14:dur="2000"/>
     </mc:Choice>
-    <mc:Fallback>
+    <mc:Fallback xmlns="">
       <p:transition spd="slow"/>
     </mc:Fallback>
   </mc:AlternateContent>
@@ -18057,18 +18029,18 @@
     </p:spTree>
     <p:extLst>
       <p:ext uri="{BB962C8B-B14F-4D97-AF65-F5344CB8AC3E}">
-        <p14:creationId xmlns:p14="http://schemas.microsoft.com/office/powerpoint/2010/main" xmlns="" val="3775352260"/>
+        <p14:creationId xmlns:p14="http://schemas.microsoft.com/office/powerpoint/2010/main" val="3775352260"/>
       </p:ext>
     </p:extLst>
   </p:cSld>
   <p:clrMapOvr>
     <a:masterClrMapping/>
   </p:clrMapOvr>
-  <mc:AlternateContent xmlns:mc="http://schemas.openxmlformats.org/markup-compatibility/2006">
-    <mc:Choice xmlns:p14="http://schemas.microsoft.com/office/powerpoint/2010/main" xmlns="" Requires="p14">
+  <mc:AlternateContent xmlns:mc="http://schemas.openxmlformats.org/markup-compatibility/2006" xmlns:p14="http://schemas.microsoft.com/office/powerpoint/2010/main">
+    <mc:Choice Requires="p14">
       <p:transition spd="slow" p14:dur="2000"/>
     </mc:Choice>
-    <mc:Fallback>
+    <mc:Fallback xmlns="">
       <p:transition spd="slow"/>
     </mc:Fallback>
   </mc:AlternateContent>
@@ -18386,18 +18358,18 @@
     </p:spTree>
     <p:extLst>
       <p:ext uri="{BB962C8B-B14F-4D97-AF65-F5344CB8AC3E}">
-        <p14:creationId xmlns:p14="http://schemas.microsoft.com/office/powerpoint/2010/main" xmlns="" val="1674554651"/>
+        <p14:creationId xmlns:p14="http://schemas.microsoft.com/office/powerpoint/2010/main" val="1674554651"/>
       </p:ext>
     </p:extLst>
   </p:cSld>
   <p:clrMapOvr>
     <a:masterClrMapping/>
   </p:clrMapOvr>
-  <mc:AlternateContent xmlns:mc="http://schemas.openxmlformats.org/markup-compatibility/2006">
-    <mc:Choice xmlns:p14="http://schemas.microsoft.com/office/powerpoint/2010/main" xmlns="" Requires="p14">
+  <mc:AlternateContent xmlns:mc="http://schemas.openxmlformats.org/markup-compatibility/2006" xmlns:p14="http://schemas.microsoft.com/office/powerpoint/2010/main">
+    <mc:Choice Requires="p14">
       <p:transition spd="slow" p14:dur="2000"/>
     </mc:Choice>
-    <mc:Fallback>
+    <mc:Fallback xmlns="">
       <p:transition spd="slow"/>
     </mc:Fallback>
   </mc:AlternateContent>
@@ -18440,8 +18412,8 @@
         </p:nvSpPr>
         <p:spPr>
           <a:xfrm>
-            <a:off x="956225" y="396400"/>
-            <a:ext cx="7492036" cy="4090800"/>
+            <a:off x="762000" y="396400"/>
+            <a:ext cx="7686261" cy="4090800"/>
           </a:xfrm>
           <a:prstGeom prst="rect">
             <a:avLst/>
@@ -18474,7 +18446,7 @@
               <a:rPr lang="ru-RU" sz="6000" dirty="0" smtClean="0"/>
               <a:t>Описание всех методов</a:t>
             </a:r>
-            <a:endParaRPr/>
+            <a:endParaRPr dirty="0"/>
           </a:p>
         </p:txBody>
       </p:sp>
@@ -18589,11 +18561,7 @@
             </a:r>
             <a:r>
               <a:rPr lang="ru-RU" dirty="0" smtClean="0"/>
-              <a:t>Вы сможете найти:</a:t>
-            </a:r>
-            <a:r>
-              <a:rPr lang="ru-RU" dirty="0" smtClean="0"/>
-              <a:t> </a:t>
+              <a:t>Вы сможете найти: </a:t>
             </a:r>
             <a:r>
               <a:rPr lang="ru-RU" dirty="0" smtClean="0">
@@ -19762,7 +19730,7 @@
           <p:nvPr>
             <p:extLst>
               <p:ext uri="{D42A27DB-BD31-4B8C-83A1-F6EECF244321}">
-                <p14:modId xmlns:p14="http://schemas.microsoft.com/office/powerpoint/2010/main" xmlns="" val="2263411008"/>
+                <p14:modId xmlns:p14="http://schemas.microsoft.com/office/powerpoint/2010/main" val="2263411008"/>
               </p:ext>
             </p:extLst>
           </p:nvPr>
@@ -19782,14 +19750,14 @@
                 <a:gridCol w="489425">
                   <a:extLst>
                     <a:ext uri="{9D8B030D-6E8A-4147-A177-3AD203B41FA5}">
-                      <a16:colId xmlns:a16="http://schemas.microsoft.com/office/drawing/2014/main" xmlns="" val="20000"/>
+                      <a16:colId xmlns:a16="http://schemas.microsoft.com/office/drawing/2014/main" val="20000"/>
                     </a:ext>
                   </a:extLst>
                 </a:gridCol>
                 <a:gridCol w="6749575">
                   <a:extLst>
                     <a:ext uri="{9D8B030D-6E8A-4147-A177-3AD203B41FA5}">
-                      <a16:colId xmlns:a16="http://schemas.microsoft.com/office/drawing/2014/main" xmlns="" val="20001"/>
+                      <a16:colId xmlns:a16="http://schemas.microsoft.com/office/drawing/2014/main" val="20001"/>
                     </a:ext>
                   </a:extLst>
                 </a:gridCol>
@@ -19990,7 +19958,7 @@
                 </a:tc>
                 <a:extLst>
                   <a:ext uri="{0D108BD9-81ED-4DB2-BD59-A6C34878D82A}">
-                    <a16:rowId xmlns:a16="http://schemas.microsoft.com/office/drawing/2014/main" xmlns="" val="10000"/>
+                    <a16:rowId xmlns:a16="http://schemas.microsoft.com/office/drawing/2014/main" val="10000"/>
                   </a:ext>
                 </a:extLst>
               </a:tr>
@@ -20165,7 +20133,7 @@
                 </a:tc>
                 <a:extLst>
                   <a:ext uri="{0D108BD9-81ED-4DB2-BD59-A6C34878D82A}">
-                    <a16:rowId xmlns:a16="http://schemas.microsoft.com/office/drawing/2014/main" xmlns="" val="10001"/>
+                    <a16:rowId xmlns:a16="http://schemas.microsoft.com/office/drawing/2014/main" val="10001"/>
                   </a:ext>
                 </a:extLst>
               </a:tr>
@@ -20343,7 +20311,7 @@
                 </a:tc>
                 <a:extLst>
                   <a:ext uri="{0D108BD9-81ED-4DB2-BD59-A6C34878D82A}">
-                    <a16:rowId xmlns:a16="http://schemas.microsoft.com/office/drawing/2014/main" xmlns="" val="10002"/>
+                    <a16:rowId xmlns:a16="http://schemas.microsoft.com/office/drawing/2014/main" val="10002"/>
                   </a:ext>
                 </a:extLst>
               </a:tr>
@@ -20383,11 +20351,11 @@
   <p:clrMapOvr>
     <a:masterClrMapping/>
   </p:clrMapOvr>
-  <mc:AlternateContent xmlns:mc="http://schemas.openxmlformats.org/markup-compatibility/2006">
-    <mc:Choice xmlns:p14="http://schemas.microsoft.com/office/powerpoint/2010/main" xmlns="" Requires="p14">
+  <mc:AlternateContent xmlns:mc="http://schemas.openxmlformats.org/markup-compatibility/2006" xmlns:p14="http://schemas.microsoft.com/office/powerpoint/2010/main">
+    <mc:Choice Requires="p14">
       <p:transition spd="slow" p14:dur="2000"/>
     </mc:Choice>
-    <mc:Fallback>
+    <mc:Fallback xmlns="">
       <p:transition spd="slow"/>
     </mc:Fallback>
   </mc:AlternateContent>
@@ -21539,7 +21507,7 @@
           <p:nvPr>
             <p:extLst>
               <p:ext uri="{D42A27DB-BD31-4B8C-83A1-F6EECF244321}">
-                <p14:modId xmlns:p14="http://schemas.microsoft.com/office/powerpoint/2010/main" xmlns="" val="2263411008"/>
+                <p14:modId xmlns:p14="http://schemas.microsoft.com/office/powerpoint/2010/main" val="2263411008"/>
               </p:ext>
             </p:extLst>
           </p:nvPr>
@@ -21559,14 +21527,14 @@
                 <a:gridCol w="489425">
                   <a:extLst>
                     <a:ext uri="{9D8B030D-6E8A-4147-A177-3AD203B41FA5}">
-                      <a16:colId xmlns:a16="http://schemas.microsoft.com/office/drawing/2014/main" xmlns="" val="20000"/>
+                      <a16:colId xmlns:a16="http://schemas.microsoft.com/office/drawing/2014/main" val="20000"/>
                     </a:ext>
                   </a:extLst>
                 </a:gridCol>
                 <a:gridCol w="6749575">
                   <a:extLst>
                     <a:ext uri="{9D8B030D-6E8A-4147-A177-3AD203B41FA5}">
-                      <a16:colId xmlns:a16="http://schemas.microsoft.com/office/drawing/2014/main" xmlns="" val="20001"/>
+                      <a16:colId xmlns:a16="http://schemas.microsoft.com/office/drawing/2014/main" val="20001"/>
                     </a:ext>
                   </a:extLst>
                 </a:gridCol>
@@ -21767,7 +21735,7 @@
                 </a:tc>
                 <a:extLst>
                   <a:ext uri="{0D108BD9-81ED-4DB2-BD59-A6C34878D82A}">
-                    <a16:rowId xmlns:a16="http://schemas.microsoft.com/office/drawing/2014/main" xmlns="" val="10000"/>
+                    <a16:rowId xmlns:a16="http://schemas.microsoft.com/office/drawing/2014/main" val="10000"/>
                   </a:ext>
                 </a:extLst>
               </a:tr>
@@ -21942,7 +21910,7 @@
                 </a:tc>
                 <a:extLst>
                   <a:ext uri="{0D108BD9-81ED-4DB2-BD59-A6C34878D82A}">
-                    <a16:rowId xmlns:a16="http://schemas.microsoft.com/office/drawing/2014/main" xmlns="" val="10001"/>
+                    <a16:rowId xmlns:a16="http://schemas.microsoft.com/office/drawing/2014/main" val="10001"/>
                   </a:ext>
                 </a:extLst>
               </a:tr>
@@ -22120,7 +22088,7 @@
                 </a:tc>
                 <a:extLst>
                   <a:ext uri="{0D108BD9-81ED-4DB2-BD59-A6C34878D82A}">
-                    <a16:rowId xmlns:a16="http://schemas.microsoft.com/office/drawing/2014/main" xmlns="" val="10002"/>
+                    <a16:rowId xmlns:a16="http://schemas.microsoft.com/office/drawing/2014/main" val="10002"/>
                   </a:ext>
                 </a:extLst>
               </a:tr>
@@ -22160,11 +22128,11 @@
   <p:clrMapOvr>
     <a:masterClrMapping/>
   </p:clrMapOvr>
-  <mc:AlternateContent xmlns:mc="http://schemas.openxmlformats.org/markup-compatibility/2006">
-    <mc:Choice xmlns:p14="http://schemas.microsoft.com/office/powerpoint/2010/main" xmlns="" Requires="p14">
+  <mc:AlternateContent xmlns:mc="http://schemas.openxmlformats.org/markup-compatibility/2006" xmlns:p14="http://schemas.microsoft.com/office/powerpoint/2010/main">
+    <mc:Choice Requires="p14">
       <p:transition spd="slow" p14:dur="2000"/>
     </mc:Choice>
-    <mc:Fallback>
+    <mc:Fallback xmlns="">
       <p:transition spd="slow"/>
     </mc:Fallback>
   </mc:AlternateContent>
@@ -22246,11 +22214,11 @@
   <p:clrMapOvr>
     <a:masterClrMapping/>
   </p:clrMapOvr>
-  <mc:AlternateContent xmlns:mc="http://schemas.openxmlformats.org/markup-compatibility/2006">
-    <mc:Choice xmlns:p14="http://schemas.microsoft.com/office/powerpoint/2010/main" xmlns="" Requires="p14">
+  <mc:AlternateContent xmlns:mc="http://schemas.openxmlformats.org/markup-compatibility/2006" xmlns:p14="http://schemas.microsoft.com/office/powerpoint/2010/main">
+    <mc:Choice Requires="p14">
       <p:transition spd="slow" p14:dur="2000"/>
     </mc:Choice>
-    <mc:Fallback>
+    <mc:Fallback xmlns="">
       <p:transition spd="slow"/>
     </mc:Fallback>
   </mc:AlternateContent>
@@ -22658,11 +22626,11 @@
   <p:clrMapOvr>
     <a:masterClrMapping/>
   </p:clrMapOvr>
-  <mc:AlternateContent xmlns:mc="http://schemas.openxmlformats.org/markup-compatibility/2006">
-    <mc:Choice xmlns:p14="http://schemas.microsoft.com/office/powerpoint/2010/main" xmlns="" Requires="p14">
+  <mc:AlternateContent xmlns:mc="http://schemas.openxmlformats.org/markup-compatibility/2006" xmlns:p14="http://schemas.microsoft.com/office/powerpoint/2010/main">
+    <mc:Choice Requires="p14">
       <p:transition spd="slow" p14:dur="2000"/>
     </mc:Choice>
-    <mc:Fallback>
+    <mc:Fallback xmlns="">
       <p:transition spd="slow"/>
     </mc:Fallback>
   </mc:AlternateContent>
@@ -22738,18 +22706,18 @@
     </p:spTree>
     <p:extLst>
       <p:ext uri="{BB962C8B-B14F-4D97-AF65-F5344CB8AC3E}">
-        <p14:creationId xmlns:p14="http://schemas.microsoft.com/office/powerpoint/2010/main" xmlns="" val="682476833"/>
+        <p14:creationId xmlns:p14="http://schemas.microsoft.com/office/powerpoint/2010/main" val="682476833"/>
       </p:ext>
     </p:extLst>
   </p:cSld>
   <p:clrMapOvr>
     <a:masterClrMapping/>
   </p:clrMapOvr>
-  <mc:AlternateContent xmlns:mc="http://schemas.openxmlformats.org/markup-compatibility/2006">
-    <mc:Choice xmlns:p14="http://schemas.microsoft.com/office/powerpoint/2010/main" xmlns="" Requires="p14">
+  <mc:AlternateContent xmlns:mc="http://schemas.openxmlformats.org/markup-compatibility/2006" xmlns:p14="http://schemas.microsoft.com/office/powerpoint/2010/main">
+    <mc:Choice Requires="p14">
       <p:transition spd="slow" p14:dur="2000"/>
     </mc:Choice>
-    <mc:Fallback>
+    <mc:Fallback xmlns="">
       <p:transition spd="slow"/>
     </mc:Fallback>
   </mc:AlternateContent>
